--- a/IoT_GreenHouseWatch_lesson_jdiabor.pptx
+++ b/IoT_GreenHouseWatch_lesson_jdiabor.pptx
@@ -11264,7 +11264,7 @@
                 <a:ea typeface="Arial" pitchFamily="34" charset="-122"/>
                 <a:cs typeface="Arial" pitchFamily="34" charset="-120"/>
               </a:rPr>
-              <a:t>Outdoor weather: real hourly Bowie, MD data (Open-Meteo archive), 1 Oct 2025 – 26 Sep 2026. Indoor values are modelled per zone from that weather.  Full chart set: outputs/01–07.</a:t>
+              <a:t>Outdoor weather: real hourly Bowie, MD data (Open-Meteo), 1 Oct 2025 – 26 Sep 2026. Indoor values modelled per zone from it (fixed seed 651).  Charts drawn by python src/visualize.py → outputs/slides/.</a:t>
             </a:r>
             <a:endParaRPr lang="en-US" sz="1300" dirty="0"/>
           </a:p>
